--- a/03-Slides/ETHAGT08/ETHAGT08-slides.pptx
+++ b/03-Slides/ETHAGT08/ETHAGT08-slides.pptx
@@ -13131,6 +13131,42 @@
         </p:nvSpPr>
         <p:spPr>
           <a:xfrm>
+            <a:off x="274320" y="6035040"/>
+            <a:ext cx="11612880" cy="320040"/>
+          </a:xfrm>
+          <a:prstGeom prst="rect">
+            <a:avLst/>
+          </a:prstGeom>
+          <a:noFill/>
+        </p:spPr>
+        <p:txBody>
+          <a:bodyPr wrap="square">
+            <a:spAutoFit/>
+          </a:bodyPr>
+          <a:lstStyle/>
+          <a:p>
+            <a:pPr algn="l">
+              <a:defRPr sz="900" b="0">
+                <a:solidFill>
+                  <a:srgbClr val="2980B9"/>
+                </a:solidFill>
+                <a:latin typeface="Segoe UI"/>
+              </a:defRPr>
+            </a:pPr>
+            <a:r>
+              <a:t>HITL = Human-in-the-Loop — Humano no Ciclo</a:t>
+            </a:r>
+          </a:p>
+        </p:txBody>
+      </p:sp>
+      <p:sp>
+        <p:nvSpPr>
+          <p:cNvPr id="8" name="TextBox 7"/>
+          <p:cNvSpPr txBox="1"/>
+          <p:nvPr/>
+        </p:nvSpPr>
+        <p:spPr>
+          <a:xfrm>
             <a:off x="274320" y="6400800"/>
             <a:ext cx="6400800" cy="365760"/>
           </a:xfrm>
@@ -13158,7 +13194,7 @@
       </p:sp>
       <p:sp>
         <p:nvSpPr>
-          <p:cNvPr id="8" name="TextBox 7"/>
+          <p:cNvPr id="9" name="TextBox 8"/>
           <p:cNvSpPr txBox="1"/>
           <p:nvPr/>
         </p:nvSpPr>
@@ -14634,6 +14670,42 @@
         </p:nvSpPr>
         <p:spPr>
           <a:xfrm>
+            <a:off x="274320" y="6035040"/>
+            <a:ext cx="11612880" cy="320040"/>
+          </a:xfrm>
+          <a:prstGeom prst="rect">
+            <a:avLst/>
+          </a:prstGeom>
+          <a:noFill/>
+        </p:spPr>
+        <p:txBody>
+          <a:bodyPr wrap="square">
+            <a:spAutoFit/>
+          </a:bodyPr>
+          <a:lstStyle/>
+          <a:p>
+            <a:pPr algn="l">
+              <a:defRPr sz="900" b="0">
+                <a:solidFill>
+                  <a:srgbClr val="2980B9"/>
+                </a:solidFill>
+                <a:latin typeface="Segoe UI"/>
+              </a:defRPr>
+            </a:pPr>
+            <a:r>
+              <a:t>ACI = Agent-Computer Interface — Interface Agente-Computador</a:t>
+            </a:r>
+          </a:p>
+        </p:txBody>
+      </p:sp>
+      <p:sp>
+        <p:nvSpPr>
+          <p:cNvPr id="8" name="TextBox 7"/>
+          <p:cNvSpPr txBox="1"/>
+          <p:nvPr/>
+        </p:nvSpPr>
+        <p:spPr>
+          <a:xfrm>
             <a:off x="274320" y="6400800"/>
             <a:ext cx="6400800" cy="365760"/>
           </a:xfrm>
@@ -14661,7 +14733,7 @@
       </p:sp>
       <p:sp>
         <p:nvSpPr>
-          <p:cNvPr id="8" name="TextBox 7"/>
+          <p:cNvPr id="9" name="TextBox 8"/>
           <p:cNvSpPr txBox="1"/>
           <p:nvPr/>
         </p:nvSpPr>
@@ -17344,6 +17416,42 @@
         </p:nvSpPr>
         <p:spPr>
           <a:xfrm>
+            <a:off x="274320" y="6035040"/>
+            <a:ext cx="11612880" cy="320040"/>
+          </a:xfrm>
+          <a:prstGeom prst="rect">
+            <a:avLst/>
+          </a:prstGeom>
+          <a:noFill/>
+        </p:spPr>
+        <p:txBody>
+          <a:bodyPr wrap="square">
+            <a:spAutoFit/>
+          </a:bodyPr>
+          <a:lstStyle/>
+          <a:p>
+            <a:pPr algn="l">
+              <a:defRPr sz="900" b="0">
+                <a:solidFill>
+                  <a:srgbClr val="2980B9"/>
+                </a:solidFill>
+                <a:latin typeface="Segoe UI"/>
+              </a:defRPr>
+            </a:pPr>
+            <a:r>
+              <a:t>AgentOps = Agent Operations — operacao e monitoramento de agentes em producao</a:t>
+            </a:r>
+          </a:p>
+        </p:txBody>
+      </p:sp>
+      <p:sp>
+        <p:nvSpPr>
+          <p:cNvPr id="8" name="TextBox 7"/>
+          <p:cNvSpPr txBox="1"/>
+          <p:nvPr/>
+        </p:nvSpPr>
+        <p:spPr>
+          <a:xfrm>
             <a:off x="274320" y="6400800"/>
             <a:ext cx="6400800" cy="365760"/>
           </a:xfrm>
@@ -17371,7 +17479,7 @@
       </p:sp>
       <p:sp>
         <p:nvSpPr>
-          <p:cNvPr id="8" name="TextBox 7"/>
+          <p:cNvPr id="9" name="TextBox 8"/>
           <p:cNvSpPr txBox="1"/>
           <p:nvPr/>
         </p:nvSpPr>
@@ -19674,6 +19782,42 @@
         </p:nvSpPr>
         <p:spPr>
           <a:xfrm>
+            <a:off x="274320" y="6035040"/>
+            <a:ext cx="11612880" cy="320040"/>
+          </a:xfrm>
+          <a:prstGeom prst="rect">
+            <a:avLst/>
+          </a:prstGeom>
+          <a:noFill/>
+        </p:spPr>
+        <p:txBody>
+          <a:bodyPr wrap="square">
+            <a:spAutoFit/>
+          </a:bodyPr>
+          <a:lstStyle/>
+          <a:p>
+            <a:pPr algn="l">
+              <a:defRPr sz="900" b="0">
+                <a:solidFill>
+                  <a:srgbClr val="2980B9"/>
+                </a:solidFill>
+                <a:latin typeface="Segoe UI"/>
+              </a:defRPr>
+            </a:pPr>
+            <a:r>
+              <a:t>ReAct = Reasoning and Acting — padrao de loop Thought / Action / Observation</a:t>
+            </a:r>
+          </a:p>
+        </p:txBody>
+      </p:sp>
+      <p:sp>
+        <p:nvSpPr>
+          <p:cNvPr id="8" name="TextBox 7"/>
+          <p:cNvSpPr txBox="1"/>
+          <p:nvPr/>
+        </p:nvSpPr>
+        <p:spPr>
+          <a:xfrm>
             <a:off x="274320" y="6400800"/>
             <a:ext cx="6400800" cy="365760"/>
           </a:xfrm>
@@ -19701,7 +19845,7 @@
       </p:sp>
       <p:sp>
         <p:nvSpPr>
-          <p:cNvPr id="8" name="TextBox 7"/>
+          <p:cNvPr id="9" name="TextBox 8"/>
           <p:cNvSpPr txBox="1"/>
           <p:nvPr/>
         </p:nvSpPr>
@@ -21015,6 +21159,42 @@
         </p:nvSpPr>
         <p:spPr>
           <a:xfrm>
+            <a:off x="274320" y="6035040"/>
+            <a:ext cx="11612880" cy="320040"/>
+          </a:xfrm>
+          <a:prstGeom prst="rect">
+            <a:avLst/>
+          </a:prstGeom>
+          <a:noFill/>
+        </p:spPr>
+        <p:txBody>
+          <a:bodyPr wrap="square">
+            <a:spAutoFit/>
+          </a:bodyPr>
+          <a:lstStyle/>
+          <a:p>
+            <a:pPr algn="l">
+              <a:defRPr sz="900" b="0">
+                <a:solidFill>
+                  <a:srgbClr val="2980B9"/>
+                </a:solidFill>
+                <a:latin typeface="Segoe UI"/>
+              </a:defRPr>
+            </a:pPr>
+            <a:r>
+              <a:t>SBOM = Software Bill of Materials — lista de componentes de software</a:t>
+            </a:r>
+          </a:p>
+        </p:txBody>
+      </p:sp>
+      <p:sp>
+        <p:nvSpPr>
+          <p:cNvPr id="8" name="TextBox 7"/>
+          <p:cNvSpPr txBox="1"/>
+          <p:nvPr/>
+        </p:nvSpPr>
+        <p:spPr>
+          <a:xfrm>
             <a:off x="274320" y="6400800"/>
             <a:ext cx="6400800" cy="365760"/>
           </a:xfrm>
@@ -21042,7 +21222,7 @@
       </p:sp>
       <p:sp>
         <p:nvSpPr>
-          <p:cNvPr id="8" name="TextBox 7"/>
+          <p:cNvPr id="9" name="TextBox 8"/>
           <p:cNvSpPr txBox="1"/>
           <p:nvPr/>
         </p:nvSpPr>
@@ -22152,6 +22332,42 @@
         </p:nvSpPr>
         <p:spPr>
           <a:xfrm>
+            <a:off x="274320" y="6035040"/>
+            <a:ext cx="11612880" cy="320040"/>
+          </a:xfrm>
+          <a:prstGeom prst="rect">
+            <a:avLst/>
+          </a:prstGeom>
+          <a:noFill/>
+        </p:spPr>
+        <p:txBody>
+          <a:bodyPr wrap="square">
+            <a:spAutoFit/>
+          </a:bodyPr>
+          <a:lstStyle/>
+          <a:p>
+            <a:pPr algn="l">
+              <a:defRPr sz="900" b="0">
+                <a:solidFill>
+                  <a:srgbClr val="2980B9"/>
+                </a:solidFill>
+                <a:latin typeface="Segoe UI"/>
+              </a:defRPr>
+            </a:pPr>
+            <a:r>
+              <a:t>ACL = Agent Communication Language — linguagem de comunicacao entre agentes</a:t>
+            </a:r>
+          </a:p>
+        </p:txBody>
+      </p:sp>
+      <p:sp>
+        <p:nvSpPr>
+          <p:cNvPr id="8" name="TextBox 7"/>
+          <p:cNvSpPr txBox="1"/>
+          <p:nvPr/>
+        </p:nvSpPr>
+        <p:spPr>
+          <a:xfrm>
             <a:off x="274320" y="6400800"/>
             <a:ext cx="6400800" cy="365760"/>
           </a:xfrm>
@@ -22179,7 +22395,7 @@
       </p:sp>
       <p:sp>
         <p:nvSpPr>
-          <p:cNvPr id="8" name="TextBox 7"/>
+          <p:cNvPr id="9" name="TextBox 8"/>
           <p:cNvSpPr txBox="1"/>
           <p:nvPr/>
         </p:nvSpPr>
@@ -24989,6 +25205,42 @@
         </p:nvSpPr>
         <p:spPr>
           <a:xfrm>
+            <a:off x="274320" y="6035040"/>
+            <a:ext cx="11612880" cy="320040"/>
+          </a:xfrm>
+          <a:prstGeom prst="rect">
+            <a:avLst/>
+          </a:prstGeom>
+          <a:noFill/>
+        </p:spPr>
+        <p:txBody>
+          <a:bodyPr wrap="square">
+            <a:spAutoFit/>
+          </a:bodyPr>
+          <a:lstStyle/>
+          <a:p>
+            <a:pPr algn="l">
+              <a:defRPr sz="900" b="0">
+                <a:solidFill>
+                  <a:srgbClr val="2980B9"/>
+                </a:solidFill>
+                <a:latin typeface="Segoe UI"/>
+              </a:defRPr>
+            </a:pPr>
+            <a:r>
+              <a:t>LLM = Large Language Model — Modelo de Linguagem de Grande Escala</a:t>
+            </a:r>
+          </a:p>
+        </p:txBody>
+      </p:sp>
+      <p:sp>
+        <p:nvSpPr>
+          <p:cNvPr id="8" name="TextBox 7"/>
+          <p:cNvSpPr txBox="1"/>
+          <p:nvPr/>
+        </p:nvSpPr>
+        <p:spPr>
+          <a:xfrm>
             <a:off x="274320" y="6400800"/>
             <a:ext cx="6400800" cy="365760"/>
           </a:xfrm>
@@ -25016,7 +25268,7 @@
       </p:sp>
       <p:sp>
         <p:nvSpPr>
-          <p:cNvPr id="8" name="TextBox 7"/>
+          <p:cNvPr id="9" name="TextBox 8"/>
           <p:cNvSpPr txBox="1"/>
           <p:nvPr/>
         </p:nvSpPr>
@@ -29088,6 +29340,42 @@
         </p:nvSpPr>
         <p:spPr>
           <a:xfrm>
+            <a:off x="274320" y="6035040"/>
+            <a:ext cx="11612880" cy="320040"/>
+          </a:xfrm>
+          <a:prstGeom prst="rect">
+            <a:avLst/>
+          </a:prstGeom>
+          <a:noFill/>
+        </p:spPr>
+        <p:txBody>
+          <a:bodyPr wrap="square">
+            <a:spAutoFit/>
+          </a:bodyPr>
+          <a:lstStyle/>
+          <a:p>
+            <a:pPr algn="l">
+              <a:defRPr sz="900" b="0">
+                <a:solidFill>
+                  <a:srgbClr val="2980B9"/>
+                </a:solidFill>
+                <a:latin typeface="Segoe UI"/>
+              </a:defRPr>
+            </a:pPr>
+            <a:r>
+              <a:t>SSE = Server-Sent Events — eventos enviados pelo servidor</a:t>
+            </a:r>
+          </a:p>
+        </p:txBody>
+      </p:sp>
+      <p:sp>
+        <p:nvSpPr>
+          <p:cNvPr id="8" name="TextBox 7"/>
+          <p:cNvSpPr txBox="1"/>
+          <p:nvPr/>
+        </p:nvSpPr>
+        <p:spPr>
+          <a:xfrm>
             <a:off x="274320" y="6400800"/>
             <a:ext cx="6400800" cy="365760"/>
           </a:xfrm>
@@ -29115,7 +29403,7 @@
       </p:sp>
       <p:sp>
         <p:nvSpPr>
-          <p:cNvPr id="8" name="TextBox 7"/>
+          <p:cNvPr id="9" name="TextBox 8"/>
           <p:cNvSpPr txBox="1"/>
           <p:nvPr/>
         </p:nvSpPr>
@@ -34201,6 +34489,42 @@
         </p:nvSpPr>
         <p:spPr>
           <a:xfrm>
+            <a:off x="274320" y="6035040"/>
+            <a:ext cx="11612880" cy="320040"/>
+          </a:xfrm>
+          <a:prstGeom prst="rect">
+            <a:avLst/>
+          </a:prstGeom>
+          <a:noFill/>
+        </p:spPr>
+        <p:txBody>
+          <a:bodyPr wrap="square">
+            <a:spAutoFit/>
+          </a:bodyPr>
+          <a:lstStyle/>
+          <a:p>
+            <a:pPr algn="l">
+              <a:defRPr sz="900" b="0">
+                <a:solidFill>
+                  <a:srgbClr val="2980B9"/>
+                </a:solidFill>
+                <a:latin typeface="Segoe UI"/>
+              </a:defRPr>
+            </a:pPr>
+            <a:r>
+              <a:t>JSON-RPC = JSON Remote Procedure Call — protocolo de RPC sobre JSON</a:t>
+            </a:r>
+          </a:p>
+        </p:txBody>
+      </p:sp>
+      <p:sp>
+        <p:nvSpPr>
+          <p:cNvPr id="8" name="TextBox 7"/>
+          <p:cNvSpPr txBox="1"/>
+          <p:nvPr/>
+        </p:nvSpPr>
+        <p:spPr>
+          <a:xfrm>
             <a:off x="274320" y="6400800"/>
             <a:ext cx="6400800" cy="365760"/>
           </a:xfrm>
@@ -34228,7 +34552,7 @@
       </p:sp>
       <p:sp>
         <p:nvSpPr>
-          <p:cNvPr id="8" name="TextBox 7"/>
+          <p:cNvPr id="9" name="TextBox 8"/>
           <p:cNvSpPr txBox="1"/>
           <p:nvPr/>
         </p:nvSpPr>
